--- a/docs/submission/IR-Deck.pptx
+++ b/docs/submission/IR-Deck.pptx
@@ -5,20 +5,20 @@
     <p:sldMasterId id="2147483648" r:id="rId1"/>
   </p:sldMasterIdLst>
   <p:notesMasterIdLst>
-    <p:notesMasterId r:id="rId12"/>
+    <p:notesMasterId r:id="rId13"/>
   </p:notesMasterIdLst>
   <p:sldIdLst>
     <p:sldId id="256" r:id="rId2"/>
     <p:sldId id="257" r:id="rId3"/>
     <p:sldId id="258" r:id="rId4"/>
     <p:sldId id="259" r:id="rId5"/>
-    <p:sldId id="266" r:id="rId17"/>
-    <p:sldId id="260" r:id="rId6"/>
-    <p:sldId id="261" r:id="rId7"/>
-    <p:sldId id="262" r:id="rId8"/>
-    <p:sldId id="263" r:id="rId9"/>
-    <p:sldId id="264" r:id="rId10"/>
-    <p:sldId id="265" r:id="rId11"/>
+    <p:sldId id="266" r:id="rId6"/>
+    <p:sldId id="260" r:id="rId7"/>
+    <p:sldId id="261" r:id="rId8"/>
+    <p:sldId id="262" r:id="rId9"/>
+    <p:sldId id="263" r:id="rId10"/>
+    <p:sldId id="264" r:id="rId11"/>
+    <p:sldId id="265" r:id="rId12"/>
   </p:sldIdLst>
   <p:sldSz cx="18288000" cy="10287000"/>
   <p:notesSz cx="10287000" cy="18288000"/>
@@ -402,7 +402,7 @@
           <a:p>
             <a:fld id="{F7021451-1387-4CA6-816F-3879F97B5CBC}" type="slidenum">
               <a:rPr lang="en-US"/>
-              <a:t>10</a:t>
+              <a:t>11</a:t>
             </a:fld>
             <a:endParaRPr lang="en-US"/>
           </a:p>
@@ -750,7 +750,7 @@
           <a:p>
             <a:fld id="{F7021451-1387-4CA6-816F-3879F97B5CBC}" type="slidenum">
               <a:rPr lang="en-US"/>
-              <a:t>5</a:t>
+              <a:t>6</a:t>
             </a:fld>
             <a:endParaRPr lang="en-US"/>
           </a:p>
@@ -837,7 +837,7 @@
           <a:p>
             <a:fld id="{F7021451-1387-4CA6-816F-3879F97B5CBC}" type="slidenum">
               <a:rPr lang="en-US"/>
-              <a:t>6</a:t>
+              <a:t>7</a:t>
             </a:fld>
             <a:endParaRPr lang="en-US"/>
           </a:p>
@@ -924,7 +924,7 @@
           <a:p>
             <a:fld id="{F7021451-1387-4CA6-816F-3879F97B5CBC}" type="slidenum">
               <a:rPr lang="en-US"/>
-              <a:t>7</a:t>
+              <a:t>8</a:t>
             </a:fld>
             <a:endParaRPr lang="en-US"/>
           </a:p>
@@ -1011,7 +1011,7 @@
           <a:p>
             <a:fld id="{F7021451-1387-4CA6-816F-3879F97B5CBC}" type="slidenum">
               <a:rPr lang="en-US"/>
-              <a:t>8</a:t>
+              <a:t>9</a:t>
             </a:fld>
             <a:endParaRPr lang="en-US"/>
           </a:p>
@@ -1098,7 +1098,7 @@
           <a:p>
             <a:fld id="{F7021451-1387-4CA6-816F-3879F97B5CBC}" type="slidenum">
               <a:rPr lang="en-US"/>
-              <a:t>9</a:t>
+              <a:t>10</a:t>
             </a:fld>
             <a:endParaRPr lang="en-US"/>
           </a:p>
@@ -1492,7 +1492,7 @@
                 <a:ea typeface="Arial" pitchFamily="34" charset="-122"/>
                 <a:cs typeface="Arial" pitchFamily="34" charset="-120"/>
               </a:rPr>
-              <a:t>01 · PITCH</a:t>
+              <a:t>01</a:t>
             </a:r>
             <a:endParaRPr lang="en-US" sz="1800" dirty="0"/>
           </a:p>
@@ -1535,8 +1535,8 @@
         </p:nvSpPr>
         <p:spPr>
           <a:xfrm>
-            <a:off x="1143000" y="3036689"/>
-            <a:ext cx="17602200" cy="1752600"/>
+            <a:off x="1761189" y="4298817"/>
+            <a:ext cx="4201732" cy="1752600"/>
           </a:xfrm>
           <a:prstGeom prst="rect">
             <a:avLst/>
@@ -1601,18 +1601,18 @@
         </p:nvSpPr>
         <p:spPr>
           <a:xfrm>
-            <a:off x="1143000" y="5170289"/>
-            <a:ext cx="8213437" cy="1264741"/>
-          </a:xfrm>
-          <a:prstGeom prst="rect">
-            <a:avLst/>
-          </a:prstGeom>
-          <a:noFill/>
-          <a:ln/>
-        </p:spPr>
-        <p:txBody>
-          <a:bodyPr wrap="square" lIns="25400" tIns="25400" rIns="25400" bIns="25400" rtlCol="0" anchor="t">
-            <a:normAutofit/>
+            <a:off x="5818046" y="4964225"/>
+            <a:ext cx="11326954" cy="1264741"/>
+          </a:xfrm>
+          <a:prstGeom prst="rect">
+            <a:avLst/>
+          </a:prstGeom>
+          <a:noFill/>
+          <a:ln/>
+        </p:spPr>
+        <p:txBody>
+          <a:bodyPr wrap="square" lIns="25400" tIns="25400" rIns="25400" bIns="25400" rtlCol="0" anchor="t">
+            <a:normAutofit lnSpcReduction="10000"/>
           </a:bodyPr>
           <a:lstStyle/>
           <a:p>
@@ -1645,7 +1645,7 @@
         </p:nvSpPr>
         <p:spPr>
           <a:xfrm>
-            <a:off x="1143000" y="6816030"/>
+            <a:off x="8870342" y="6609966"/>
             <a:ext cx="8164756" cy="491430"/>
           </a:xfrm>
           <a:prstGeom prst="rect">
@@ -1677,150 +1677,141 @@
                 <a:ea typeface="Arial" pitchFamily="34" charset="-122"/>
                 <a:cs typeface="Arial" pitchFamily="34" charset="-120"/>
               </a:rPr>
-              <a:t>글로벌 업무 메시지 AI 교정 크롬 확장</a:t>
+              <a:t>글로벌 업무 메시지 AI 교정 </a:t>
+            </a:r>
+            <a:r>
+              <a:rPr lang="en-US" sz="2550" dirty="0" err="1">
+                <a:solidFill>
+                  <a:srgbClr val="201E1D">
+                    <a:alpha val="60000"/>
+                  </a:srgbClr>
+                </a:solidFill>
+                <a:latin typeface="Arial" pitchFamily="34" charset="0"/>
+                <a:ea typeface="Arial" pitchFamily="34" charset="-122"/>
+                <a:cs typeface="Arial" pitchFamily="34" charset="-120"/>
+              </a:rPr>
+              <a:t>크롬</a:t>
+            </a:r>
+            <a:r>
+              <a:rPr lang="en-US" sz="2550" dirty="0">
+                <a:solidFill>
+                  <a:srgbClr val="201E1D">
+                    <a:alpha val="60000"/>
+                  </a:srgbClr>
+                </a:solidFill>
+                <a:latin typeface="Arial" pitchFamily="34" charset="0"/>
+                <a:ea typeface="Arial" pitchFamily="34" charset="-122"/>
+                <a:cs typeface="Arial" pitchFamily="34" charset="-120"/>
+              </a:rPr>
+              <a:t> </a:t>
+            </a:r>
+            <a:r>
+              <a:rPr lang="en-US" sz="2550" dirty="0" err="1">
+                <a:solidFill>
+                  <a:srgbClr val="201E1D">
+                    <a:alpha val="60000"/>
+                  </a:srgbClr>
+                </a:solidFill>
+                <a:latin typeface="Arial" pitchFamily="34" charset="0"/>
+                <a:ea typeface="Arial" pitchFamily="34" charset="-122"/>
+                <a:cs typeface="Arial" pitchFamily="34" charset="-120"/>
+              </a:rPr>
+              <a:t>확장</a:t>
+            </a:r>
+            <a:r>
+              <a:rPr lang="en-US" sz="2550" dirty="0">
+                <a:solidFill>
+                  <a:srgbClr val="201E1D">
+                    <a:alpha val="60000"/>
+                  </a:srgbClr>
+                </a:solidFill>
+                <a:latin typeface="Arial" pitchFamily="34" charset="0"/>
+                <a:ea typeface="Arial" pitchFamily="34" charset="-122"/>
+                <a:cs typeface="Arial" pitchFamily="34" charset="-120"/>
+              </a:rPr>
+              <a:t> </a:t>
+            </a:r>
+            <a:r>
+              <a:rPr lang="ko-KR" altLang="en-US" sz="2550" dirty="0">
+                <a:solidFill>
+                  <a:srgbClr val="201E1D">
+                    <a:alpha val="60000"/>
+                  </a:srgbClr>
+                </a:solidFill>
+                <a:latin typeface="Arial" pitchFamily="34" charset="0"/>
+                <a:ea typeface="Arial" pitchFamily="34" charset="-122"/>
+                <a:cs typeface="Arial" pitchFamily="34" charset="-120"/>
+              </a:rPr>
+              <a:t>프로그램</a:t>
             </a:r>
             <a:endParaRPr lang="en-US" sz="2550" dirty="0"/>
           </a:p>
         </p:txBody>
       </p:sp>
-      <p:sp>
-        <p:nvSpPr>
-          <p:cNvPr id="7" name="Text 5"/>
-          <p:cNvSpPr/>
-          <p:nvPr/>
-        </p:nvSpPr>
-        <p:spPr>
-          <a:xfrm>
-            <a:off x="1143000" y="8789789"/>
-            <a:ext cx="3615556" cy="392311"/>
-          </a:xfrm>
-          <a:prstGeom prst="rect">
-            <a:avLst/>
-          </a:prstGeom>
-          <a:noFill/>
-          <a:ln/>
-        </p:spPr>
-        <p:txBody>
-          <a:bodyPr wrap="square" lIns="25400" tIns="25400" rIns="25400" bIns="25400" rtlCol="0" anchor="t">
-            <a:normAutofit/>
-          </a:bodyPr>
-          <a:lstStyle/>
-          <a:p>
-            <a:pPr marL="0" indent="0" algn="l">
-              <a:lnSpc>
-                <a:spcPct val="132857"/>
-              </a:lnSpc>
-              <a:buNone/>
-            </a:pPr>
-            <a:r>
-              <a:rPr lang="en-US" sz="1800" dirty="0">
-                <a:solidFill>
-                  <a:srgbClr val="201E1D">
-                    <a:alpha val="55000"/>
-                  </a:srgbClr>
-                </a:solidFill>
-                <a:latin typeface="Arial" pitchFamily="34" charset="0"/>
-                <a:ea typeface="Arial" pitchFamily="34" charset="-122"/>
-                <a:cs typeface="Arial" pitchFamily="34" charset="-120"/>
-              </a:rPr>
-              <a:t>Chrome 확장 · Firebase · OpenAI</a:t>
-            </a:r>
-            <a:endParaRPr lang="en-US" sz="1800" dirty="0"/>
-          </a:p>
-        </p:txBody>
-      </p:sp>
-      <p:sp>
-        <p:nvSpPr>
-          <p:cNvPr id="8" name="Text 6"/>
-          <p:cNvSpPr/>
-          <p:nvPr/>
-        </p:nvSpPr>
-        <p:spPr>
-          <a:xfrm>
-            <a:off x="4620369" y="8789789"/>
-            <a:ext cx="152400" cy="392311"/>
-          </a:xfrm>
-          <a:prstGeom prst="rect">
-            <a:avLst/>
-          </a:prstGeom>
-          <a:noFill/>
-          <a:ln/>
-        </p:spPr>
-        <p:txBody>
-          <a:bodyPr wrap="square" lIns="25400" tIns="25400" rIns="25400" bIns="25400" rtlCol="0" anchor="t">
-            <a:normAutofit/>
-          </a:bodyPr>
-          <a:lstStyle/>
-          <a:p>
-            <a:pPr marL="0" indent="0" algn="l">
-              <a:lnSpc>
-                <a:spcPct val="132857"/>
-              </a:lnSpc>
-              <a:buNone/>
-            </a:pPr>
-            <a:r>
-              <a:rPr lang="en-US" sz="1800" dirty="0">
-                <a:solidFill>
-                  <a:srgbClr val="201E1D">
-                    <a:alpha val="55000"/>
-                  </a:srgbClr>
-                </a:solidFill>
-                <a:latin typeface="Arial" pitchFamily="34" charset="0"/>
-                <a:ea typeface="Arial" pitchFamily="34" charset="-122"/>
-                <a:cs typeface="Arial" pitchFamily="34" charset="-120"/>
-              </a:rPr>
-              <a:t>·</a:t>
-            </a:r>
-            <a:endParaRPr lang="en-US" sz="1800" dirty="0"/>
-          </a:p>
-        </p:txBody>
-      </p:sp>
-      <p:sp>
-        <p:nvSpPr>
-          <p:cNvPr id="9" name="Text 7"/>
-          <p:cNvSpPr/>
-          <p:nvPr/>
-        </p:nvSpPr>
-        <p:spPr>
-          <a:xfrm>
-            <a:off x="4887069" y="8789789"/>
-            <a:ext cx="595610" cy="392311"/>
-          </a:xfrm>
-          <a:prstGeom prst="rect">
-            <a:avLst/>
-          </a:prstGeom>
-          <a:noFill/>
-          <a:ln/>
-        </p:spPr>
-        <p:txBody>
-          <a:bodyPr wrap="square" lIns="25400" tIns="25400" rIns="25400" bIns="25400" rtlCol="0" anchor="t">
-            <a:normAutofit/>
-          </a:bodyPr>
-          <a:lstStyle/>
-          <a:p>
-            <a:pPr marL="0" indent="0" algn="l">
-              <a:lnSpc>
-                <a:spcPct val="132857"/>
-              </a:lnSpc>
-              <a:buNone/>
-            </a:pPr>
-            <a:r>
-              <a:rPr lang="en-US" sz="1800" dirty="0">
-                <a:solidFill>
-                  <a:srgbClr val="201E1D">
-                    <a:alpha val="55000"/>
-                  </a:srgbClr>
-                </a:solidFill>
-                <a:latin typeface="Arial" pitchFamily="34" charset="0"/>
-                <a:ea typeface="Arial" pitchFamily="34" charset="-122"/>
-                <a:cs typeface="Arial" pitchFamily="34" charset="-120"/>
-              </a:rPr>
-              <a:t>2026</a:t>
-            </a:r>
-            <a:endParaRPr lang="en-US" sz="1800" dirty="0"/>
-          </a:p>
-        </p:txBody>
-      </p:sp>
+      <p:pic>
+        <p:nvPicPr>
+          <p:cNvPr id="11" name="그림 10" descr="Sai 로고 시안-selection">
+            <a:extLst>
+              <a:ext uri="{FF2B5EF4-FFF2-40B4-BE49-F238E27FC236}">
+                <a16:creationId xmlns:a16="http://schemas.microsoft.com/office/drawing/2014/main" id="{8BF25718-4051-8CDE-7DB2-19DC655D2A44}"/>
+              </a:ext>
+            </a:extLst>
+          </p:cNvPr>
+          <p:cNvPicPr>
+            <a:picLocks noGrp="1" noChangeAspect="1"/>
+          </p:cNvPicPr>
+          <p:nvPr isPhoto="1"/>
+        </p:nvPicPr>
+        <p:blipFill>
+          <a:blip r:embed="rId3">
+            <a:lum/>
+          </a:blip>
+          <a:srcRect l="20291" r="23691"/>
+          <a:stretch>
+            <a:fillRect/>
+          </a:stretch>
+        </p:blipFill>
+        <p:spPr>
+          <a:xfrm>
+            <a:off x="1154241" y="2276129"/>
+            <a:ext cx="2310180" cy="1881809"/>
+          </a:xfrm>
+          <a:prstGeom prst="rect">
+            <a:avLst/>
+          </a:prstGeom>
+        </p:spPr>
+      </p:pic>
+      <p:pic>
+        <p:nvPicPr>
+          <p:cNvPr id="14" name="그림 13">
+            <a:extLst>
+              <a:ext uri="{FF2B5EF4-FFF2-40B4-BE49-F238E27FC236}">
+                <a16:creationId xmlns:a16="http://schemas.microsoft.com/office/drawing/2014/main" id="{E1A4AE09-1402-D6F0-DD5E-1BD2BED20565}"/>
+              </a:ext>
+            </a:extLst>
+          </p:cNvPr>
+          <p:cNvPicPr>
+            <a:picLocks noChangeAspect="1"/>
+          </p:cNvPicPr>
+          <p:nvPr/>
+        </p:nvPicPr>
+        <p:blipFill>
+          <a:blip r:embed="rId4"/>
+          <a:srcRect l="26176" t="40553" r="31363" b="40047"/>
+          <a:stretch>
+            <a:fillRect/>
+          </a:stretch>
+        </p:blipFill>
+        <p:spPr>
+          <a:xfrm>
+            <a:off x="15506163" y="421258"/>
+            <a:ext cx="2459865" cy="632169"/>
+          </a:xfrm>
+          <a:prstGeom prst="rect">
+            <a:avLst/>
+          </a:prstGeom>
+        </p:spPr>
+      </p:pic>
     </p:spTree>
   </p:cSld>
   <p:clrMapOvr>
@@ -2584,7 +2575,7 @@
         </p:spPr>
         <p:txBody>
           <a:bodyPr wrap="square" lIns="25400" tIns="25400" rIns="25400" bIns="25400" rtlCol="0" anchor="t">
-            <a:normAutofit/>
+            <a:normAutofit lnSpcReduction="10000"/>
           </a:bodyPr>
           <a:lstStyle/>
           <a:p>
@@ -2609,6 +2600,37 @@
           </a:p>
         </p:txBody>
       </p:sp>
+      <p:pic>
+        <p:nvPicPr>
+          <p:cNvPr id="21" name="그림 20">
+            <a:extLst>
+              <a:ext uri="{FF2B5EF4-FFF2-40B4-BE49-F238E27FC236}">
+                <a16:creationId xmlns:a16="http://schemas.microsoft.com/office/drawing/2014/main" id="{19BCAD93-BA43-9403-0AAD-66321062B9DA}"/>
+              </a:ext>
+            </a:extLst>
+          </p:cNvPr>
+          <p:cNvPicPr>
+            <a:picLocks noChangeAspect="1"/>
+          </p:cNvPicPr>
+          <p:nvPr/>
+        </p:nvPicPr>
+        <p:blipFill>
+          <a:blip r:embed="rId3"/>
+          <a:srcRect l="26176" t="40553" r="31363" b="40047"/>
+          <a:stretch>
+            <a:fillRect/>
+          </a:stretch>
+        </p:blipFill>
+        <p:spPr>
+          <a:xfrm>
+            <a:off x="15506163" y="421258"/>
+            <a:ext cx="2459865" cy="632169"/>
+          </a:xfrm>
+          <a:prstGeom prst="rect">
+            <a:avLst/>
+          </a:prstGeom>
+        </p:spPr>
+      </p:pic>
     </p:spTree>
   </p:cSld>
   <p:clrMapOvr>
@@ -2644,33 +2666,6 @@
       </p:grpSpPr>
       <p:sp>
         <p:nvSpPr>
-          <p:cNvPr id="2" name="Shape 0"/>
-          <p:cNvSpPr/>
-          <p:nvPr/>
-        </p:nvSpPr>
-        <p:spPr>
-          <a:xfrm>
-            <a:off x="18154650" y="0"/>
-            <a:ext cx="133350" cy="10287000"/>
-          </a:xfrm>
-          <a:prstGeom prst="rect">
-            <a:avLst/>
-          </a:prstGeom>
-          <a:solidFill>
-            <a:srgbClr val="FF6000"/>
-          </a:solidFill>
-          <a:ln/>
-        </p:spPr>
-        <p:txBody>
-          <a:bodyPr/>
-          <a:lstStyle/>
-          <a:p>
-            <a:endParaRPr lang="ko-KR" altLang="en-US"/>
-          </a:p>
-        </p:txBody>
-      </p:sp>
-      <p:sp>
-        <p:nvSpPr>
           <p:cNvPr id="3" name="Shape 1"/>
           <p:cNvSpPr/>
           <p:nvPr/>
@@ -2830,52 +2825,6 @@
                 <a:cs typeface="Arial" pitchFamily="34" charset="-120"/>
               </a:rPr>
               <a:t>S·AI — Bridging People, Time, and Space</a:t>
-            </a:r>
-            <a:endParaRPr lang="en-US" sz="2100" dirty="0"/>
-          </a:p>
-        </p:txBody>
-      </p:sp>
-      <p:sp>
-        <p:nvSpPr>
-          <p:cNvPr id="7" name="Text 5"/>
-          <p:cNvSpPr/>
-          <p:nvPr/>
-        </p:nvSpPr>
-        <p:spPr>
-          <a:xfrm>
-            <a:off x="13310295" y="8730704"/>
-            <a:ext cx="4218176" cy="451396"/>
-          </a:xfrm>
-          <a:prstGeom prst="rect">
-            <a:avLst/>
-          </a:prstGeom>
-          <a:noFill/>
-          <a:ln/>
-        </p:spPr>
-        <p:txBody>
-          <a:bodyPr wrap="square" lIns="25400" tIns="25400" rIns="25400" bIns="25400" rtlCol="0" anchor="t">
-            <a:normAutofit/>
-          </a:bodyPr>
-          <a:lstStyle/>
-          <a:p>
-            <a:pPr marL="0" indent="0" algn="l">
-              <a:lnSpc>
-                <a:spcPct val="135625"/>
-              </a:lnSpc>
-              <a:buNone/>
-            </a:pPr>
-            <a:r>
-              <a:rPr lang="en-US" sz="2100" dirty="0">
-                <a:solidFill>
-                  <a:srgbClr val="201E1D">
-                    <a:alpha val="55000"/>
-                  </a:srgbClr>
-                </a:solidFill>
-                <a:latin typeface="Arial" pitchFamily="34" charset="0"/>
-                <a:ea typeface="Arial" pitchFamily="34" charset="-122"/>
-                <a:cs typeface="Arial" pitchFamily="34" charset="-120"/>
-              </a:rPr>
-              <a:t>Chrome 확장 · Firebase · OpenAI</a:t>
             </a:r>
             <a:endParaRPr lang="en-US" sz="2100" dirty="0"/>
           </a:p>
@@ -3556,7 +3505,7 @@
         </p:spPr>
         <p:txBody>
           <a:bodyPr wrap="square" lIns="25400" tIns="25400" rIns="25400" bIns="25400" rtlCol="0" anchor="t">
-            <a:normAutofit/>
+            <a:normAutofit lnSpcReduction="10000"/>
           </a:bodyPr>
           <a:lstStyle/>
           <a:p>
@@ -3583,6 +3532,37 @@
           </a:p>
         </p:txBody>
       </p:sp>
+      <p:pic>
+        <p:nvPicPr>
+          <p:cNvPr id="19" name="그림 18">
+            <a:extLst>
+              <a:ext uri="{FF2B5EF4-FFF2-40B4-BE49-F238E27FC236}">
+                <a16:creationId xmlns:a16="http://schemas.microsoft.com/office/drawing/2014/main" id="{A6FED5F1-8B8F-0273-E0EB-A03F33A2A208}"/>
+              </a:ext>
+            </a:extLst>
+          </p:cNvPr>
+          <p:cNvPicPr>
+            <a:picLocks noChangeAspect="1"/>
+          </p:cNvPicPr>
+          <p:nvPr/>
+        </p:nvPicPr>
+        <p:blipFill>
+          <a:blip r:embed="rId3"/>
+          <a:srcRect l="26176" t="40553" r="31363" b="40047"/>
+          <a:stretch>
+            <a:fillRect/>
+          </a:stretch>
+        </p:blipFill>
+        <p:spPr>
+          <a:xfrm>
+            <a:off x="15506163" y="421258"/>
+            <a:ext cx="2459865" cy="632169"/>
+          </a:xfrm>
+          <a:prstGeom prst="rect">
+            <a:avLst/>
+          </a:prstGeom>
+        </p:spPr>
+      </p:pic>
     </p:spTree>
   </p:cSld>
   <p:clrMapOvr>
@@ -3838,7 +3818,7 @@
         </p:spPr>
         <p:txBody>
           <a:bodyPr wrap="square" lIns="25400" tIns="25400" rIns="25400" bIns="25400" rtlCol="0" anchor="t">
-            <a:normAutofit/>
+            <a:normAutofit lnSpcReduction="10000"/>
           </a:bodyPr>
           <a:lstStyle/>
           <a:p>
@@ -4102,7 +4082,7 @@
         </p:spPr>
         <p:txBody>
           <a:bodyPr wrap="square" lIns="25400" tIns="25400" rIns="25400" bIns="25400" rtlCol="0" anchor="t">
-            <a:normAutofit/>
+            <a:normAutofit lnSpcReduction="10000"/>
           </a:bodyPr>
           <a:lstStyle/>
           <a:p>
@@ -4173,6 +4153,37 @@
           </a:p>
         </p:txBody>
       </p:sp>
+      <p:pic>
+        <p:nvPicPr>
+          <p:cNvPr id="16" name="그림 15">
+            <a:extLst>
+              <a:ext uri="{FF2B5EF4-FFF2-40B4-BE49-F238E27FC236}">
+                <a16:creationId xmlns:a16="http://schemas.microsoft.com/office/drawing/2014/main" id="{7E45F2A4-6322-D1C9-9637-C2B1169B4529}"/>
+              </a:ext>
+            </a:extLst>
+          </p:cNvPr>
+          <p:cNvPicPr>
+            <a:picLocks noChangeAspect="1"/>
+          </p:cNvPicPr>
+          <p:nvPr/>
+        </p:nvPicPr>
+        <p:blipFill>
+          <a:blip r:embed="rId3"/>
+          <a:srcRect l="26176" t="40553" r="31363" b="40047"/>
+          <a:stretch>
+            <a:fillRect/>
+          </a:stretch>
+        </p:blipFill>
+        <p:spPr>
+          <a:xfrm>
+            <a:off x="15506163" y="421258"/>
+            <a:ext cx="2459865" cy="632169"/>
+          </a:xfrm>
+          <a:prstGeom prst="rect">
+            <a:avLst/>
+          </a:prstGeom>
+        </p:spPr>
+      </p:pic>
     </p:spTree>
   </p:cSld>
   <p:clrMapOvr>
@@ -4415,7 +4426,7 @@
         </p:spPr>
         <p:txBody>
           <a:bodyPr wrap="square" lIns="25400" tIns="25400" rIns="25400" bIns="25400" rtlCol="0" anchor="t">
-            <a:normAutofit/>
+            <a:normAutofit lnSpcReduction="10000"/>
           </a:bodyPr>
           <a:lstStyle/>
           <a:p>
@@ -4459,7 +4470,7 @@
         </p:spPr>
         <p:txBody>
           <a:bodyPr wrap="square" lIns="25400" tIns="25400" rIns="25400" bIns="25400" rtlCol="0" anchor="t">
-            <a:normAutofit/>
+            <a:normAutofit lnSpcReduction="10000"/>
           </a:bodyPr>
           <a:lstStyle/>
           <a:p>
@@ -4578,7 +4589,7 @@
         </p:spPr>
         <p:txBody>
           <a:bodyPr wrap="square" lIns="25400" tIns="25400" rIns="25400" bIns="25400" rtlCol="0" anchor="t">
-            <a:normAutofit/>
+            <a:normAutofit lnSpcReduction="10000"/>
           </a:bodyPr>
           <a:lstStyle/>
           <a:p>
@@ -4622,7 +4633,7 @@
         </p:spPr>
         <p:txBody>
           <a:bodyPr wrap="square" lIns="25400" tIns="25400" rIns="25400" bIns="25400" rtlCol="0" anchor="t">
-            <a:normAutofit/>
+            <a:normAutofit lnSpcReduction="10000"/>
           </a:bodyPr>
           <a:lstStyle/>
           <a:p>
@@ -4741,7 +4752,7 @@
         </p:spPr>
         <p:txBody>
           <a:bodyPr wrap="square" lIns="25400" tIns="25400" rIns="25400" bIns="25400" rtlCol="0" anchor="t">
-            <a:normAutofit/>
+            <a:normAutofit lnSpcReduction="10000"/>
           </a:bodyPr>
           <a:lstStyle/>
           <a:p>
@@ -4785,7 +4796,7 @@
         </p:spPr>
         <p:txBody>
           <a:bodyPr wrap="square" lIns="25400" tIns="25400" rIns="25400" bIns="25400" rtlCol="0" anchor="t">
-            <a:normAutofit/>
+            <a:normAutofit lnSpcReduction="10000"/>
           </a:bodyPr>
           <a:lstStyle/>
           <a:p>
@@ -4831,7 +4842,7 @@
         </p:spPr>
         <p:txBody>
           <a:bodyPr wrap="square" lIns="25400" tIns="25400" rIns="25400" bIns="25400" rtlCol="0" anchor="t">
-            <a:normAutofit/>
+            <a:normAutofit lnSpcReduction="10000"/>
           </a:bodyPr>
           <a:lstStyle/>
           <a:p>
@@ -4856,6 +4867,37 @@
           </a:p>
         </p:txBody>
       </p:sp>
+      <p:pic>
+        <p:nvPicPr>
+          <p:cNvPr id="19" name="그림 18">
+            <a:extLst>
+              <a:ext uri="{FF2B5EF4-FFF2-40B4-BE49-F238E27FC236}">
+                <a16:creationId xmlns:a16="http://schemas.microsoft.com/office/drawing/2014/main" id="{7AA17961-460F-D8DC-850D-2E52BE85B2BF}"/>
+              </a:ext>
+            </a:extLst>
+          </p:cNvPr>
+          <p:cNvPicPr>
+            <a:picLocks noChangeAspect="1"/>
+          </p:cNvPicPr>
+          <p:nvPr/>
+        </p:nvPicPr>
+        <p:blipFill>
+          <a:blip r:embed="rId3"/>
+          <a:srcRect l="26176" t="40553" r="31363" b="40047"/>
+          <a:stretch>
+            <a:fillRect/>
+          </a:stretch>
+        </p:blipFill>
+        <p:spPr>
+          <a:xfrm>
+            <a:off x="15506163" y="421258"/>
+            <a:ext cx="2459865" cy="632169"/>
+          </a:xfrm>
+          <a:prstGeom prst="rect">
+            <a:avLst/>
+          </a:prstGeom>
+        </p:spPr>
+      </p:pic>
     </p:spTree>
   </p:cSld>
   <p:clrMapOvr>
@@ -4865,7 +4907,7 @@
 </file>
 
 <file path=ppt/slides/slide5.xml><?xml version="1.0" encoding="utf-8"?>
-<p:sld xmlns:a="http://schemas.openxmlformats.org/drawingml/2006/main" xmlns:p="http://schemas.openxmlformats.org/presentationml/2006/main" xmlns:r="http://schemas.openxmlformats.org/officeDocument/2006/relationships">
+<p:sld xmlns:a="http://schemas.openxmlformats.org/drawingml/2006/main" xmlns:r="http://schemas.openxmlformats.org/officeDocument/2006/relationships" xmlns:p="http://schemas.openxmlformats.org/presentationml/2006/main">
   <p:cSld>
     <p:spTree>
       <p:nvGrpSpPr>
@@ -4873,7 +4915,14 @@
         <p:cNvGrpSpPr/>
         <p:nvPr/>
       </p:nvGrpSpPr>
-      <p:grpSpPr/>
+      <p:grpSpPr>
+        <a:xfrm>
+          <a:off x="0" y="0"/>
+          <a:ext cx="0" cy="0"/>
+          <a:chOff x="0" y="0"/>
+          <a:chExt cx="0" cy="0"/>
+        </a:xfrm>
+      </p:grpSpPr>
       <p:sp>
         <p:nvSpPr>
           <p:cNvPr id="2" name="Text 0"/>
@@ -4985,7 +5034,7 @@
                 <a:ea typeface="Arial" pitchFamily="34" charset="-122"/>
                 <a:cs typeface="Arial" pitchFamily="34" charset="-120"/>
               </a:rPr>
-              <a:t>쓰던 창에서, 그 자리에서</a:t>
+              <a:t>말 대신, 화면으로 보여드립니다</a:t>
             </a:r>
             <a:endParaRPr lang="en-US" sz="4800" dirty="0"/>
           </a:p>
@@ -5083,7 +5132,7 @@
         </p:spPr>
         <p:txBody>
           <a:bodyPr wrap="square" lIns="25400" tIns="25400" rIns="25400" bIns="25400" rtlCol="0" anchor="t">
-            <a:normAutofit/>
+            <a:normAutofit lnSpcReduction="10000"/>
           </a:bodyPr>
           <a:lstStyle/>
           <a:p>
@@ -5127,7 +5176,7 @@
         </p:spPr>
         <p:txBody>
           <a:bodyPr wrap="square" lIns="25400" tIns="25400" rIns="25400" bIns="25400" rtlCol="0" anchor="t">
-            <a:normAutofit/>
+            <a:normAutofit lnSpcReduction="10000"/>
           </a:bodyPr>
           <a:lstStyle/>
           <a:p>
@@ -5246,7 +5295,7 @@
         </p:spPr>
         <p:txBody>
           <a:bodyPr wrap="square" lIns="25400" tIns="25400" rIns="25400" bIns="25400" rtlCol="0" anchor="t">
-            <a:normAutofit/>
+            <a:normAutofit lnSpcReduction="10000"/>
           </a:bodyPr>
           <a:lstStyle/>
           <a:p>
@@ -5290,7 +5339,7 @@
         </p:spPr>
         <p:txBody>
           <a:bodyPr wrap="square" lIns="25400" tIns="25400" rIns="25400" bIns="25400" rtlCol="0" anchor="t">
-            <a:normAutofit/>
+            <a:normAutofit lnSpcReduction="10000"/>
           </a:bodyPr>
           <a:lstStyle/>
           <a:p>
@@ -5409,7 +5458,7 @@
         </p:spPr>
         <p:txBody>
           <a:bodyPr wrap="square" lIns="25400" tIns="25400" rIns="25400" bIns="25400" rtlCol="0" anchor="t">
-            <a:normAutofit/>
+            <a:normAutofit lnSpcReduction="10000"/>
           </a:bodyPr>
           <a:lstStyle/>
           <a:p>
@@ -5453,7 +5502,7 @@
         </p:spPr>
         <p:txBody>
           <a:bodyPr wrap="square" lIns="25400" tIns="25400" rIns="25400" bIns="25400" rtlCol="0" anchor="t">
-            <a:normAutofit/>
+            <a:normAutofit lnSpcReduction="10000"/>
           </a:bodyPr>
           <a:lstStyle/>
           <a:p>
@@ -5499,7 +5548,7 @@
         </p:spPr>
         <p:txBody>
           <a:bodyPr wrap="square" lIns="25400" tIns="25400" rIns="25400" bIns="25400" rtlCol="0" anchor="t">
-            <a:normAutofit/>
+            <a:normAutofit lnSpcReduction="10000"/>
           </a:bodyPr>
           <a:lstStyle/>
           <a:p>
@@ -5524,6 +5573,37 @@
           </a:p>
         </p:txBody>
       </p:sp>
+      <p:pic>
+        <p:nvPicPr>
+          <p:cNvPr id="19" name="그림 18">
+            <a:extLst>
+              <a:ext uri="{FF2B5EF4-FFF2-40B4-BE49-F238E27FC236}">
+                <a16:creationId xmlns:a16="http://schemas.microsoft.com/office/drawing/2014/main" id="{D7A1495C-780D-D03F-78C0-F98BD066DEF1}"/>
+              </a:ext>
+            </a:extLst>
+          </p:cNvPr>
+          <p:cNvPicPr>
+            <a:picLocks noChangeAspect="1"/>
+          </p:cNvPicPr>
+          <p:nvPr/>
+        </p:nvPicPr>
+        <p:blipFill>
+          <a:blip r:embed="rId2"/>
+          <a:srcRect l="26176" t="40553" r="31363" b="40047"/>
+          <a:stretch>
+            <a:fillRect/>
+          </a:stretch>
+        </p:blipFill>
+        <p:spPr>
+          <a:xfrm>
+            <a:off x="15506163" y="421258"/>
+            <a:ext cx="2459865" cy="632169"/>
+          </a:xfrm>
+          <a:prstGeom prst="rect">
+            <a:avLst/>
+          </a:prstGeom>
+        </p:spPr>
+      </p:pic>
     </p:spTree>
   </p:cSld>
   <p:clrMapOvr>
@@ -5693,7 +5773,7 @@
         </p:spPr>
         <p:txBody>
           <a:bodyPr wrap="square" lIns="25400" tIns="25400" rIns="25400" bIns="25400" rtlCol="0" anchor="t">
-            <a:normAutofit/>
+            <a:normAutofit lnSpcReduction="10000"/>
           </a:bodyPr>
           <a:lstStyle/>
           <a:p>
@@ -5818,9 +5898,26 @@
                 <a:ea typeface="Arial" pitchFamily="34" charset="-122"/>
                 <a:cs typeface="Arial" pitchFamily="34" charset="-120"/>
               </a:rPr>
-              <a:t>캐주얼 OFF · CRITICAL</a:t>
-            </a:r>
-            <a:endParaRPr lang="en-US" sz="1800" dirty="0"/>
+              <a:t>캐주얼 OFF · </a:t>
+            </a:r>
+            <a:r>
+              <a:rPr lang="en-US" sz="1800" b="1" kern="0" spc="108" dirty="0">
+                <a:solidFill>
+                  <a:srgbClr val="FF6000">
+                    <a:alpha val="55000"/>
+                  </a:srgbClr>
+                </a:solidFill>
+                <a:latin typeface="Arial" pitchFamily="34" charset="0"/>
+                <a:ea typeface="Arial" pitchFamily="34" charset="-122"/>
+                <a:cs typeface="Arial" pitchFamily="34" charset="-120"/>
+              </a:rPr>
+              <a:t>CRITICAL</a:t>
+            </a:r>
+            <a:endParaRPr lang="en-US" sz="1800" dirty="0">
+              <a:solidFill>
+                <a:srgbClr val="FF6000"/>
+              </a:solidFill>
+            </a:endParaRPr>
           </a:p>
         </p:txBody>
       </p:sp>
@@ -5843,7 +5940,7 @@
         </p:spPr>
         <p:txBody>
           <a:bodyPr wrap="square" lIns="25400" tIns="25400" rIns="25400" bIns="25400" rtlCol="0" anchor="t">
-            <a:normAutofit/>
+            <a:normAutofit lnSpcReduction="10000"/>
           </a:bodyPr>
           <a:lstStyle/>
           <a:p>
@@ -5908,85 +6005,19 @@
                 <a:ea typeface="Arial" pitchFamily="34" charset="-122"/>
                 <a:cs typeface="Arial" pitchFamily="34" charset="-120"/>
               </a:rPr>
-              <a:t>캐주얼 ON · CRITICAL</a:t>
-            </a:r>
-            <a:endParaRPr lang="en-US" sz="1800" dirty="0"/>
-          </a:p>
-        </p:txBody>
-      </p:sp>
-      <p:sp>
-        <p:nvSpPr>
-          <p:cNvPr id="11" name="Text 9"/>
-          <p:cNvSpPr/>
-          <p:nvPr/>
-        </p:nvSpPr>
-        <p:spPr>
-          <a:xfrm>
-            <a:off x="9753600" y="4633466"/>
-            <a:ext cx="8130540" cy="411361"/>
-          </a:xfrm>
-          <a:prstGeom prst="rect">
-            <a:avLst/>
-          </a:prstGeom>
-          <a:noFill/>
-          <a:ln/>
-        </p:spPr>
-        <p:txBody>
-          <a:bodyPr wrap="square" lIns="25400" tIns="25400" rIns="25400" bIns="25400" rtlCol="0" anchor="t">
-            <a:normAutofit/>
-          </a:bodyPr>
-          <a:lstStyle/>
-          <a:p>
-            <a:pPr marL="0" indent="0" algn="l">
-              <a:lnSpc>
-                <a:spcPct val="122500"/>
-              </a:lnSpc>
-              <a:buNone/>
-            </a:pPr>
-            <a:r>
-              <a:rPr lang="en-US" sz="2100" dirty="0">
-                <a:solidFill>
-                  <a:srgbClr val="201E1D"/>
-                </a:solidFill>
-                <a:latin typeface="Arial" pitchFamily="34" charset="0"/>
-                <a:ea typeface="Arial" pitchFamily="34" charset="-122"/>
-                <a:cs typeface="Arial" pitchFamily="34" charset="-120"/>
-              </a:rPr>
-              <a:t>we need to deploy this by today</a:t>
-            </a:r>
-            <a:endParaRPr lang="en-US" sz="2100" dirty="0"/>
-          </a:p>
-        </p:txBody>
-      </p:sp>
-      <p:sp>
-        <p:nvSpPr>
-          <p:cNvPr id="12" name="Text 10"/>
-          <p:cNvSpPr/>
-          <p:nvPr/>
-        </p:nvSpPr>
-        <p:spPr>
-          <a:xfrm>
-            <a:off x="1143000" y="6456313"/>
-            <a:ext cx="8130540" cy="392311"/>
-          </a:xfrm>
-          <a:prstGeom prst="rect">
-            <a:avLst/>
-          </a:prstGeom>
-          <a:noFill/>
-          <a:ln/>
-        </p:spPr>
-        <p:txBody>
-          <a:bodyPr wrap="square" lIns="25400" tIns="25400" rIns="25400" bIns="25400" rtlCol="0" anchor="t">
-            <a:normAutofit/>
-          </a:bodyPr>
-          <a:lstStyle/>
-          <a:p>
-            <a:pPr marL="0" indent="0" algn="l">
-              <a:lnSpc>
-                <a:spcPct val="132857"/>
-              </a:lnSpc>
-              <a:buNone/>
-            </a:pPr>
+              <a:t>캐주얼 </a:t>
+            </a:r>
+            <a:r>
+              <a:rPr lang="en-US" sz="1800" b="1" kern="0" spc="108" dirty="0">
+                <a:solidFill>
+                  <a:srgbClr val="FF6000"/>
+                </a:solidFill>
+                <a:latin typeface="Arial" pitchFamily="34" charset="0"/>
+                <a:ea typeface="Arial" pitchFamily="34" charset="-122"/>
+                <a:cs typeface="Arial" pitchFamily="34" charset="-120"/>
+              </a:rPr>
+              <a:t>ON</a:t>
+            </a:r>
             <a:r>
               <a:rPr lang="en-US" sz="1800" b="1" kern="0" spc="108" dirty="0">
                 <a:solidFill>
@@ -5998,21 +6029,38 @@
                 <a:ea typeface="Arial" pitchFamily="34" charset="-122"/>
                 <a:cs typeface="Arial" pitchFamily="34" charset="-120"/>
               </a:rPr>
-              <a:t>캐주얼 OFF · LOW</a:t>
-            </a:r>
-            <a:endParaRPr lang="en-US" sz="1800" dirty="0"/>
-          </a:p>
-        </p:txBody>
-      </p:sp>
-      <p:sp>
-        <p:nvSpPr>
-          <p:cNvPr id="13" name="Text 11"/>
-          <p:cNvSpPr/>
-          <p:nvPr/>
-        </p:nvSpPr>
-        <p:spPr>
-          <a:xfrm>
-            <a:off x="1143000" y="6886724"/>
+              <a:t> · </a:t>
+            </a:r>
+            <a:r>
+              <a:rPr lang="en-US" sz="1800" b="1" kern="0" spc="108" dirty="0">
+                <a:solidFill>
+                  <a:srgbClr val="FF6000">
+                    <a:alpha val="55000"/>
+                  </a:srgbClr>
+                </a:solidFill>
+                <a:latin typeface="Arial" pitchFamily="34" charset="0"/>
+                <a:ea typeface="Arial" pitchFamily="34" charset="-122"/>
+                <a:cs typeface="Arial" pitchFamily="34" charset="-120"/>
+              </a:rPr>
+              <a:t>CRITICAL</a:t>
+            </a:r>
+            <a:endParaRPr lang="en-US" sz="1800" dirty="0">
+              <a:solidFill>
+                <a:srgbClr val="FF6000"/>
+              </a:solidFill>
+            </a:endParaRPr>
+          </a:p>
+        </p:txBody>
+      </p:sp>
+      <p:sp>
+        <p:nvSpPr>
+          <p:cNvPr id="11" name="Text 9"/>
+          <p:cNvSpPr/>
+          <p:nvPr/>
+        </p:nvSpPr>
+        <p:spPr>
+          <a:xfrm>
+            <a:off x="9753600" y="4633466"/>
             <a:ext cx="8130540" cy="411361"/>
           </a:xfrm>
           <a:prstGeom prst="rect">
@@ -6023,7 +6071,7 @@
         </p:spPr>
         <p:txBody>
           <a:bodyPr wrap="square" lIns="25400" tIns="25400" rIns="25400" bIns="25400" rtlCol="0" anchor="t">
-            <a:normAutofit/>
+            <a:normAutofit lnSpcReduction="10000"/>
           </a:bodyPr>
           <a:lstStyle/>
           <a:p>
@@ -6042,7 +6090,7 @@
                 <a:ea typeface="Arial" pitchFamily="34" charset="-122"/>
                 <a:cs typeface="Arial" pitchFamily="34" charset="-120"/>
               </a:rPr>
-              <a:t>could you ensure… by today when you get a chance?</a:t>
+              <a:t>we need to deploy this by today</a:t>
             </a:r>
             <a:endParaRPr lang="en-US" sz="2100" dirty="0"/>
           </a:p>
@@ -6050,13 +6098,13 @@
       </p:sp>
       <p:sp>
         <p:nvSpPr>
-          <p:cNvPr id="14" name="Text 12"/>
-          <p:cNvSpPr/>
-          <p:nvPr/>
-        </p:nvSpPr>
-        <p:spPr>
-          <a:xfrm>
-            <a:off x="9753600" y="6456313"/>
+          <p:cNvPr id="12" name="Text 10"/>
+          <p:cNvSpPr/>
+          <p:nvPr/>
+        </p:nvSpPr>
+        <p:spPr>
+          <a:xfrm>
+            <a:off x="1143000" y="6456313"/>
             <a:ext cx="8130540" cy="392311"/>
           </a:xfrm>
           <a:prstGeom prst="rect">
@@ -6088,7 +6136,121 @@
                 <a:ea typeface="Arial" pitchFamily="34" charset="-122"/>
                 <a:cs typeface="Arial" pitchFamily="34" charset="-120"/>
               </a:rPr>
-              <a:t>캐주얼 ON · LOW</a:t>
+              <a:t>캐주얼 OFF · LOW</a:t>
+            </a:r>
+            <a:endParaRPr lang="en-US" sz="1800" dirty="0"/>
+          </a:p>
+        </p:txBody>
+      </p:sp>
+      <p:sp>
+        <p:nvSpPr>
+          <p:cNvPr id="13" name="Text 11"/>
+          <p:cNvSpPr/>
+          <p:nvPr/>
+        </p:nvSpPr>
+        <p:spPr>
+          <a:xfrm>
+            <a:off x="1143000" y="6886724"/>
+            <a:ext cx="8130540" cy="411361"/>
+          </a:xfrm>
+          <a:prstGeom prst="rect">
+            <a:avLst/>
+          </a:prstGeom>
+          <a:noFill/>
+          <a:ln/>
+        </p:spPr>
+        <p:txBody>
+          <a:bodyPr wrap="square" lIns="25400" tIns="25400" rIns="25400" bIns="25400" rtlCol="0" anchor="t">
+            <a:normAutofit lnSpcReduction="10000"/>
+          </a:bodyPr>
+          <a:lstStyle/>
+          <a:p>
+            <a:pPr marL="0" indent="0" algn="l">
+              <a:lnSpc>
+                <a:spcPct val="122500"/>
+              </a:lnSpc>
+              <a:buNone/>
+            </a:pPr>
+            <a:r>
+              <a:rPr lang="en-US" sz="2100" dirty="0">
+                <a:solidFill>
+                  <a:srgbClr val="201E1D"/>
+                </a:solidFill>
+                <a:latin typeface="Arial" pitchFamily="34" charset="0"/>
+                <a:ea typeface="Arial" pitchFamily="34" charset="-122"/>
+                <a:cs typeface="Arial" pitchFamily="34" charset="-120"/>
+              </a:rPr>
+              <a:t>could you ensure… by today when you get a chance?</a:t>
+            </a:r>
+            <a:endParaRPr lang="en-US" sz="2100" dirty="0"/>
+          </a:p>
+        </p:txBody>
+      </p:sp>
+      <p:sp>
+        <p:nvSpPr>
+          <p:cNvPr id="14" name="Text 12"/>
+          <p:cNvSpPr/>
+          <p:nvPr/>
+        </p:nvSpPr>
+        <p:spPr>
+          <a:xfrm>
+            <a:off x="9753600" y="6456313"/>
+            <a:ext cx="8130540" cy="392311"/>
+          </a:xfrm>
+          <a:prstGeom prst="rect">
+            <a:avLst/>
+          </a:prstGeom>
+          <a:noFill/>
+          <a:ln/>
+        </p:spPr>
+        <p:txBody>
+          <a:bodyPr wrap="square" lIns="25400" tIns="25400" rIns="25400" bIns="25400" rtlCol="0" anchor="t">
+            <a:normAutofit/>
+          </a:bodyPr>
+          <a:lstStyle/>
+          <a:p>
+            <a:pPr marL="0" indent="0" algn="l">
+              <a:lnSpc>
+                <a:spcPct val="132857"/>
+              </a:lnSpc>
+              <a:buNone/>
+            </a:pPr>
+            <a:r>
+              <a:rPr lang="en-US" sz="1800" b="1" kern="0" spc="108" dirty="0">
+                <a:solidFill>
+                  <a:srgbClr val="201E1D">
+                    <a:alpha val="55000"/>
+                  </a:srgbClr>
+                </a:solidFill>
+                <a:latin typeface="Arial" pitchFamily="34" charset="0"/>
+                <a:ea typeface="Arial" pitchFamily="34" charset="-122"/>
+                <a:cs typeface="Arial" pitchFamily="34" charset="-120"/>
+              </a:rPr>
+              <a:t>캐주얼 </a:t>
+            </a:r>
+            <a:r>
+              <a:rPr lang="en-US" sz="1800" b="1" kern="0" spc="108" dirty="0">
+                <a:solidFill>
+                  <a:srgbClr val="FF6000"/>
+                </a:solidFill>
+                <a:latin typeface="Arial" pitchFamily="34" charset="0"/>
+                <a:ea typeface="Arial" pitchFamily="34" charset="-122"/>
+                <a:cs typeface="Arial" pitchFamily="34" charset="-120"/>
+              </a:rPr>
+              <a:t>ON</a:t>
+            </a:r>
+            <a:r>
+              <a:rPr lang="en-US" sz="1800" b="1" kern="0" spc="108" dirty="0">
+                <a:solidFill>
+                  <a:srgbClr val="201E1D">
+                    <a:alpha val="55000"/>
+                  </a:srgbClr>
+                </a:solidFill>
+                <a:latin typeface="Arial" pitchFamily="34" charset="0"/>
+                <a:ea typeface="Arial" pitchFamily="34" charset="-122"/>
+                <a:cs typeface="Arial" pitchFamily="34" charset="-120"/>
+              </a:rPr>
+              <a:t> · LOW</a:t>
             </a:r>
             <a:endParaRPr lang="en-US" sz="1800" dirty="0"/>
           </a:p>
@@ -6113,7 +6275,7 @@
         </p:spPr>
         <p:txBody>
           <a:bodyPr wrap="square" lIns="25400" tIns="25400" rIns="25400" bIns="25400" rtlCol="0" anchor="t">
-            <a:normAutofit/>
+            <a:normAutofit lnSpcReduction="10000"/>
           </a:bodyPr>
           <a:lstStyle/>
           <a:p>
@@ -6182,6 +6344,37 @@
           </a:p>
         </p:txBody>
       </p:sp>
+      <p:pic>
+        <p:nvPicPr>
+          <p:cNvPr id="18" name="그림 17">
+            <a:extLst>
+              <a:ext uri="{FF2B5EF4-FFF2-40B4-BE49-F238E27FC236}">
+                <a16:creationId xmlns:a16="http://schemas.microsoft.com/office/drawing/2014/main" id="{08F0128E-8125-3F64-0B71-93F75BE5B04E}"/>
+              </a:ext>
+            </a:extLst>
+          </p:cNvPr>
+          <p:cNvPicPr>
+            <a:picLocks noChangeAspect="1"/>
+          </p:cNvPicPr>
+          <p:nvPr/>
+        </p:nvPicPr>
+        <p:blipFill>
+          <a:blip r:embed="rId3"/>
+          <a:srcRect l="26176" t="40553" r="31363" b="40047"/>
+          <a:stretch>
+            <a:fillRect/>
+          </a:stretch>
+        </p:blipFill>
+        <p:spPr>
+          <a:xfrm>
+            <a:off x="15506163" y="421258"/>
+            <a:ext cx="2459865" cy="632169"/>
+          </a:xfrm>
+          <a:prstGeom prst="rect">
+            <a:avLst/>
+          </a:prstGeom>
+        </p:spPr>
+      </p:pic>
     </p:spTree>
   </p:cSld>
   <p:clrMapOvr>
@@ -6296,7 +6489,7 @@
         </p:nvSpPr>
         <p:spPr>
           <a:xfrm>
-            <a:off x="1143000" y="1850000"/>
+            <a:off x="1143000" y="1862879"/>
             <a:ext cx="17602200" cy="708571"/>
           </a:xfrm>
           <a:prstGeom prst="rect">
@@ -6426,7 +6619,7 @@
         </p:spPr>
         <p:txBody>
           <a:bodyPr wrap="square" lIns="25400" tIns="25400" rIns="25400" bIns="25400" rtlCol="0" anchor="t">
-            <a:normAutofit/>
+            <a:normAutofit lnSpcReduction="10000"/>
           </a:bodyPr>
           <a:lstStyle/>
           <a:p>
@@ -6545,7 +6738,7 @@
         </p:spPr>
         <p:txBody>
           <a:bodyPr wrap="square" lIns="25400" tIns="25400" rIns="25400" bIns="25400" rtlCol="0" anchor="t">
-            <a:normAutofit/>
+            <a:normAutofit lnSpcReduction="10000"/>
           </a:bodyPr>
           <a:lstStyle/>
           <a:p>
@@ -6664,7 +6857,7 @@
         </p:spPr>
         <p:txBody>
           <a:bodyPr wrap="square" lIns="25400" tIns="25400" rIns="25400" bIns="25400" rtlCol="0" anchor="t">
-            <a:normAutofit/>
+            <a:normAutofit lnSpcReduction="10000"/>
           </a:bodyPr>
           <a:lstStyle/>
           <a:p>
@@ -6783,7 +6976,7 @@
         </p:spPr>
         <p:txBody>
           <a:bodyPr wrap="square" lIns="25400" tIns="25400" rIns="25400" bIns="25400" rtlCol="0" anchor="t">
-            <a:normAutofit/>
+            <a:normAutofit lnSpcReduction="10000"/>
           </a:bodyPr>
           <a:lstStyle/>
           <a:p>
@@ -6900,7 +7093,7 @@
       </p:sp>
       <p:sp>
         <p:nvSpPr>
-          <p:cNvPr id="12" name="Shape 10"/>
+          <p:cNvPr id="19" name="Shape 10"/>
           <p:cNvSpPr/>
           <p:nvPr/>
         </p:nvSpPr>
@@ -6929,7 +7122,7 @@
       </p:sp>
       <p:sp>
         <p:nvSpPr>
-          <p:cNvPr id="13" name="Text 11"/>
+          <p:cNvPr id="20" name="Text 11"/>
           <p:cNvSpPr/>
           <p:nvPr/>
         </p:nvSpPr>
@@ -6946,7 +7139,7 @@
         </p:spPr>
         <p:txBody>
           <a:bodyPr wrap="square" lIns="25400" tIns="25400" rIns="25400" bIns="25400" rtlCol="0" anchor="t">
-            <a:normAutofit/>
+            <a:normAutofit lnSpcReduction="10000"/>
           </a:bodyPr>
           <a:lstStyle/>
           <a:p>
@@ -6973,7 +7166,7 @@
       </p:sp>
       <p:sp>
         <p:nvSpPr>
-          <p:cNvPr id="14" name="Text 12"/>
+          <p:cNvPr id="21" name="Text 12"/>
           <p:cNvSpPr/>
           <p:nvPr/>
         </p:nvSpPr>
@@ -7019,7 +7212,7 @@
       </p:sp>
       <p:sp>
         <p:nvSpPr>
-          <p:cNvPr id="15" name="Shape 13"/>
+          <p:cNvPr id="22" name="Shape 13"/>
           <p:cNvSpPr/>
           <p:nvPr/>
         </p:nvSpPr>
@@ -7048,7 +7241,7 @@
       </p:sp>
       <p:sp>
         <p:nvSpPr>
-          <p:cNvPr id="16" name="Text 14"/>
+          <p:cNvPr id="23" name="Text 14"/>
           <p:cNvSpPr/>
           <p:nvPr/>
         </p:nvSpPr>
@@ -7065,7 +7258,7 @@
         </p:spPr>
         <p:txBody>
           <a:bodyPr wrap="square" lIns="25400" tIns="25400" rIns="25400" bIns="25400" rtlCol="0" anchor="t">
-            <a:normAutofit/>
+            <a:normAutofit lnSpcReduction="10000"/>
           </a:bodyPr>
           <a:lstStyle/>
           <a:p>
@@ -7092,7 +7285,7 @@
       </p:sp>
       <p:sp>
         <p:nvSpPr>
-          <p:cNvPr id="17" name="Text 15"/>
+          <p:cNvPr id="24" name="Text 15"/>
           <p:cNvSpPr/>
           <p:nvPr/>
         </p:nvSpPr>
@@ -7109,7 +7302,7 @@
         </p:spPr>
         <p:txBody>
           <a:bodyPr wrap="square" lIns="25400" tIns="25400" rIns="25400" bIns="25400" rtlCol="0" anchor="t">
-            <a:normAutofit/>
+            <a:normAutofit lnSpcReduction="10000"/>
           </a:bodyPr>
           <a:lstStyle/>
           <a:p>
@@ -7136,6 +7329,37 @@
           </a:p>
         </p:txBody>
       </p:sp>
+      <p:pic>
+        <p:nvPicPr>
+          <p:cNvPr id="26" name="그림 25">
+            <a:extLst>
+              <a:ext uri="{FF2B5EF4-FFF2-40B4-BE49-F238E27FC236}">
+                <a16:creationId xmlns:a16="http://schemas.microsoft.com/office/drawing/2014/main" id="{F7E21FC3-C8D5-8BA2-0D04-40120BB122D9}"/>
+              </a:ext>
+            </a:extLst>
+          </p:cNvPr>
+          <p:cNvPicPr>
+            <a:picLocks noChangeAspect="1"/>
+          </p:cNvPicPr>
+          <p:nvPr/>
+        </p:nvPicPr>
+        <p:blipFill>
+          <a:blip r:embed="rId3"/>
+          <a:srcRect l="26176" t="40553" r="31363" b="40047"/>
+          <a:stretch>
+            <a:fillRect/>
+          </a:stretch>
+        </p:blipFill>
+        <p:spPr>
+          <a:xfrm>
+            <a:off x="15506163" y="421258"/>
+            <a:ext cx="2459865" cy="632169"/>
+          </a:xfrm>
+          <a:prstGeom prst="rect">
+            <a:avLst/>
+          </a:prstGeom>
+        </p:spPr>
+      </p:pic>
     </p:spTree>
   </p:cSld>
   <p:clrMapOvr>
@@ -7334,7 +7558,7 @@
         </p:spPr>
         <p:txBody>
           <a:bodyPr wrap="square" lIns="25400" tIns="25400" rIns="25400" bIns="25400" rtlCol="0" anchor="t">
-            <a:normAutofit/>
+            <a:normAutofit lnSpcReduction="10000"/>
           </a:bodyPr>
           <a:lstStyle/>
           <a:p>
@@ -7453,7 +7677,7 @@
         </p:spPr>
         <p:txBody>
           <a:bodyPr wrap="square" lIns="25400" tIns="25400" rIns="25400" bIns="25400" rtlCol="0" anchor="t">
-            <a:normAutofit/>
+            <a:normAutofit lnSpcReduction="10000"/>
           </a:bodyPr>
           <a:lstStyle/>
           <a:p>
@@ -7572,7 +7796,7 @@
         </p:spPr>
         <p:txBody>
           <a:bodyPr wrap="square" lIns="25400" tIns="25400" rIns="25400" bIns="25400" rtlCol="0" anchor="t">
-            <a:normAutofit/>
+            <a:normAutofit lnSpcReduction="10000"/>
           </a:bodyPr>
           <a:lstStyle/>
           <a:p>
@@ -7687,6 +7911,37 @@
           </a:p>
         </p:txBody>
       </p:sp>
+      <p:pic>
+        <p:nvPicPr>
+          <p:cNvPr id="16" name="그림 15">
+            <a:extLst>
+              <a:ext uri="{FF2B5EF4-FFF2-40B4-BE49-F238E27FC236}">
+                <a16:creationId xmlns:a16="http://schemas.microsoft.com/office/drawing/2014/main" id="{E9613D93-B6C3-919F-4514-02E9C85BA38B}"/>
+              </a:ext>
+            </a:extLst>
+          </p:cNvPr>
+          <p:cNvPicPr>
+            <a:picLocks noChangeAspect="1"/>
+          </p:cNvPicPr>
+          <p:nvPr/>
+        </p:nvPicPr>
+        <p:blipFill>
+          <a:blip r:embed="rId3"/>
+          <a:srcRect l="26176" t="40553" r="31363" b="40047"/>
+          <a:stretch>
+            <a:fillRect/>
+          </a:stretch>
+        </p:blipFill>
+        <p:spPr>
+          <a:xfrm>
+            <a:off x="15506163" y="421258"/>
+            <a:ext cx="2459865" cy="632169"/>
+          </a:xfrm>
+          <a:prstGeom prst="rect">
+            <a:avLst/>
+          </a:prstGeom>
+        </p:spPr>
+      </p:pic>
     </p:spTree>
   </p:cSld>
   <p:clrMapOvr>
@@ -7929,7 +8184,7 @@
         </p:spPr>
         <p:txBody>
           <a:bodyPr wrap="square" lIns="25400" tIns="25400" rIns="25400" bIns="25400" rtlCol="0" anchor="t">
-            <a:normAutofit/>
+            <a:normAutofit lnSpcReduction="10000"/>
           </a:bodyPr>
           <a:lstStyle/>
           <a:p>
@@ -8299,6 +8554,37 @@
           </a:p>
         </p:txBody>
       </p:sp>
+      <p:pic>
+        <p:nvPicPr>
+          <p:cNvPr id="17" name="그림 16">
+            <a:extLst>
+              <a:ext uri="{FF2B5EF4-FFF2-40B4-BE49-F238E27FC236}">
+                <a16:creationId xmlns:a16="http://schemas.microsoft.com/office/drawing/2014/main" id="{6EC8609A-3646-85FC-4810-DBF5B85A6FB8}"/>
+              </a:ext>
+            </a:extLst>
+          </p:cNvPr>
+          <p:cNvPicPr>
+            <a:picLocks noChangeAspect="1"/>
+          </p:cNvPicPr>
+          <p:nvPr/>
+        </p:nvPicPr>
+        <p:blipFill>
+          <a:blip r:embed="rId3"/>
+          <a:srcRect l="26176" t="40553" r="31363" b="40047"/>
+          <a:stretch>
+            <a:fillRect/>
+          </a:stretch>
+        </p:blipFill>
+        <p:spPr>
+          <a:xfrm>
+            <a:off x="15506163" y="421258"/>
+            <a:ext cx="2459865" cy="632169"/>
+          </a:xfrm>
+          <a:prstGeom prst="rect">
+            <a:avLst/>
+          </a:prstGeom>
+        </p:spPr>
+      </p:pic>
     </p:spTree>
   </p:cSld>
   <p:clrMapOvr>

--- a/docs/submission/IR-Deck.pptx
+++ b/docs/submission/IR-Deck.pptx
@@ -2700,36 +2700,76 @@
         <p:spPr>
           <a:xfrm>
             <a:off x="1143000" y="3911352"/>
-            <a:ext cx="12571250" cy="2013049"/>
-          </a:xfrm>
-          <a:prstGeom prst="rect">
-            <a:avLst/>
-          </a:prstGeom>
-          <a:noFill/>
-          <a:ln/>
-        </p:spPr>
-        <p:txBody>
-          <a:bodyPr wrap="square" lIns="25400" tIns="25400" rIns="25400" bIns="25400" rtlCol="0" anchor="t">
-            <a:normAutofit/>
-          </a:bodyPr>
-          <a:lstStyle/>
-          <a:p>
-            <a:pPr marL="0" indent="0" algn="l">
-              <a:lnSpc>
-                <a:spcPct val="76235"/>
-              </a:lnSpc>
+            <a:ext cx="12701789" cy="2013049"/>
+          </a:xfrm>
+          <a:prstGeom prst="rect">
+            <a:avLst/>
+          </a:prstGeom>
+          <a:noFill/>
+          <a:ln/>
+        </p:spPr>
+        <p:txBody>
+          <a:bodyPr wrap="square" lIns="25400" tIns="25400" rIns="25400" bIns="25400" rtlCol="0" anchor="t">
+            <a:normAutofit fontScale="92500" lnSpcReduction="10000"/>
+          </a:bodyPr>
+          <a:lstStyle/>
+          <a:p>
+            <a:pPr marL="0" indent="0" algn="l">
               <a:buNone/>
             </a:pPr>
             <a:r>
               <a:rPr lang="en-US" sz="7200" b="1" kern="0" spc="-144" dirty="0">
                 <a:solidFill>
+                  <a:srgbClr val="FF6F18"/>
+                </a:solidFill>
+                <a:latin typeface="Arial" pitchFamily="34" charset="0"/>
+                <a:ea typeface="Arial" pitchFamily="34" charset="-122"/>
+                <a:cs typeface="Arial" pitchFamily="34" charset="-120"/>
+              </a:rPr>
+              <a:t>번역</a:t>
+            </a:r>
+            <a:r>
+              <a:rPr lang="en-US" sz="7200" b="1" kern="0" spc="-144" dirty="0">
+                <a:solidFill>
                   <a:srgbClr val="201E1D"/>
                 </a:solidFill>
                 <a:latin typeface="Arial" pitchFamily="34" charset="0"/>
                 <a:ea typeface="Arial" pitchFamily="34" charset="-122"/>
                 <a:cs typeface="Arial" pitchFamily="34" charset="-120"/>
               </a:rPr>
-              <a:t>번역은 이미 잘 됩니다. 우리는 그다음을 </a:t>
+              <a:t>은 이미 잘 됩니다. </a:t>
+            </a:r>
+            <a:br>
+              <a:rPr lang="en-US" sz="7200" b="1" kern="0" spc="-144" dirty="0">
+                <a:solidFill>
+                  <a:srgbClr val="201E1D"/>
+                </a:solidFill>
+                <a:latin typeface="Arial" pitchFamily="34" charset="0"/>
+                <a:ea typeface="Arial" pitchFamily="34" charset="-122"/>
+                <a:cs typeface="Arial" pitchFamily="34" charset="-120"/>
+              </a:rPr>
+            </a:br>
+            <a:r>
+              <a:rPr lang="en-US" sz="7200" b="1" kern="0" spc="-144" dirty="0" err="1">
+                <a:solidFill>
+                  <a:srgbClr val="201E1D"/>
+                </a:solidFill>
+                <a:latin typeface="Arial" pitchFamily="34" charset="0"/>
+                <a:ea typeface="Arial" pitchFamily="34" charset="-122"/>
+                <a:cs typeface="Arial" pitchFamily="34" charset="-120"/>
+              </a:rPr>
+              <a:t>우리는</a:t>
+            </a:r>
+            <a:r>
+              <a:rPr lang="en-US" sz="7200" b="1" kern="0" spc="-144" dirty="0">
+                <a:solidFill>
+                  <a:srgbClr val="201E1D"/>
+                </a:solidFill>
+                <a:latin typeface="Arial" pitchFamily="34" charset="0"/>
+                <a:ea typeface="Arial" pitchFamily="34" charset="-122"/>
+                <a:cs typeface="Arial" pitchFamily="34" charset="-120"/>
+              </a:rPr>
+              <a:t> 그다음을 </a:t>
             </a:r>
             <a:r>
               <a:rPr lang="en-US" sz="7200" b="1" kern="0" spc="-144" dirty="0">
@@ -3516,11 +3556,9 @@
               <a:buNone/>
             </a:pPr>
             <a:r>
-              <a:rPr lang="en-US" sz="2100" dirty="0">
-                <a:solidFill>
-                  <a:srgbClr val="201E1D">
-                    <a:alpha val="60000"/>
-                  </a:srgbClr>
+              <a:rPr lang="en-US" sz="2100" b="1" dirty="0">
+                <a:solidFill>
+                  <a:srgbClr val="009B64"/>
                 </a:solidFill>
                 <a:latin typeface="Arial" pitchFamily="34" charset="0"/>
                 <a:ea typeface="Arial" pitchFamily="34" charset="-122"/>
@@ -3528,7 +3566,11 @@
               </a:rPr>
               <a:t>두 번째 줄은 실측이다. 「기획서」를 서로 다른 번역기가 product spec · project plan으로 옮겼다 — 톤이 아니라 무엇을 하라는지가 바뀌었다.</a:t>
             </a:r>
-            <a:endParaRPr lang="en-US" sz="2100" dirty="0"/>
+            <a:endParaRPr lang="en-US" sz="2100" b="1" dirty="0">
+              <a:solidFill>
+                <a:srgbClr val="009B64"/>
+              </a:solidFill>
+            </a:endParaRPr>
           </a:p>
         </p:txBody>
       </p:sp>
